--- a/寶貴十架.pptx
+++ b/寶貴十架.pptx
@@ -167,10 +167,9 @@
           <a:lstStyle/>
           <a:p>
             <a:r>
-              <a:rPr lang="zh-TW" altLang="en-US" smtClean="0"/>
+              <a:rPr lang="zh-TW" altLang="en-US"/>
               <a:t>按一下以編輯母片標題樣式</a:t>
             </a:r>
-            <a:endParaRPr lang="zh-TW" altLang="en-US"/>
           </a:p>
         </p:txBody>
       </p:sp>
@@ -286,10 +285,9 @@
           </a:lstStyle>
           <a:p>
             <a:r>
-              <a:rPr lang="zh-TW" altLang="en-US" smtClean="0"/>
+              <a:rPr lang="zh-TW" altLang="en-US"/>
               <a:t>按一下以編輯母片副標題樣式</a:t>
             </a:r>
-            <a:endParaRPr lang="zh-TW" altLang="en-US"/>
           </a:p>
         </p:txBody>
       </p:sp>
@@ -310,7 +308,7 @@
           <a:p>
             <a:fld id="{BF8A0AAD-D6E1-44F2-B02F-85D3C6F6FFED}" type="datetimeFigureOut">
               <a:rPr lang="zh-TW" altLang="en-US" smtClean="0"/>
-              <a:t>2023/4/1</a:t>
+              <a:t>2024/4/6</a:t>
             </a:fld>
             <a:endParaRPr lang="zh-TW" altLang="en-US"/>
           </a:p>
@@ -399,10 +397,9 @@
           <a:lstStyle/>
           <a:p>
             <a:r>
-              <a:rPr lang="zh-TW" altLang="en-US" smtClean="0"/>
+              <a:rPr lang="zh-TW" altLang="en-US"/>
               <a:t>按一下以編輯母片標題樣式</a:t>
             </a:r>
-            <a:endParaRPr lang="zh-TW" altLang="en-US"/>
           </a:p>
         </p:txBody>
       </p:sp>
@@ -423,38 +420,37 @@
           <a:p>
             <a:pPr lvl="0"/>
             <a:r>
-              <a:rPr lang="zh-TW" altLang="en-US" smtClean="0"/>
+              <a:rPr lang="zh-TW" altLang="en-US"/>
               <a:t>按一下以編輯母片文字樣式</a:t>
             </a:r>
           </a:p>
           <a:p>
             <a:pPr lvl="1"/>
             <a:r>
-              <a:rPr lang="zh-TW" altLang="en-US" smtClean="0"/>
+              <a:rPr lang="zh-TW" altLang="en-US"/>
               <a:t>第二層</a:t>
             </a:r>
           </a:p>
           <a:p>
             <a:pPr lvl="2"/>
             <a:r>
-              <a:rPr lang="zh-TW" altLang="en-US" smtClean="0"/>
+              <a:rPr lang="zh-TW" altLang="en-US"/>
               <a:t>第三層</a:t>
             </a:r>
           </a:p>
           <a:p>
             <a:pPr lvl="3"/>
             <a:r>
-              <a:rPr lang="zh-TW" altLang="en-US" smtClean="0"/>
+              <a:rPr lang="zh-TW" altLang="en-US"/>
               <a:t>第四層</a:t>
             </a:r>
           </a:p>
           <a:p>
             <a:pPr lvl="4"/>
             <a:r>
-              <a:rPr lang="zh-TW" altLang="en-US" smtClean="0"/>
+              <a:rPr lang="zh-TW" altLang="en-US"/>
               <a:t>第五層</a:t>
             </a:r>
-            <a:endParaRPr lang="zh-TW" altLang="en-US"/>
           </a:p>
         </p:txBody>
       </p:sp>
@@ -475,7 +471,7 @@
           <a:p>
             <a:fld id="{BF8A0AAD-D6E1-44F2-B02F-85D3C6F6FFED}" type="datetimeFigureOut">
               <a:rPr lang="zh-TW" altLang="en-US" smtClean="0"/>
-              <a:t>2023/4/1</a:t>
+              <a:t>2024/4/6</a:t>
             </a:fld>
             <a:endParaRPr lang="zh-TW" altLang="en-US"/>
           </a:p>
@@ -569,10 +565,9 @@
           <a:lstStyle/>
           <a:p>
             <a:r>
-              <a:rPr lang="zh-TW" altLang="en-US" smtClean="0"/>
+              <a:rPr lang="zh-TW" altLang="en-US"/>
               <a:t>按一下以編輯母片標題樣式</a:t>
             </a:r>
-            <a:endParaRPr lang="zh-TW" altLang="en-US"/>
           </a:p>
         </p:txBody>
       </p:sp>
@@ -598,38 +593,37 @@
           <a:p>
             <a:pPr lvl="0"/>
             <a:r>
-              <a:rPr lang="zh-TW" altLang="en-US" smtClean="0"/>
+              <a:rPr lang="zh-TW" altLang="en-US"/>
               <a:t>按一下以編輯母片文字樣式</a:t>
             </a:r>
           </a:p>
           <a:p>
             <a:pPr lvl="1"/>
             <a:r>
-              <a:rPr lang="zh-TW" altLang="en-US" smtClean="0"/>
+              <a:rPr lang="zh-TW" altLang="en-US"/>
               <a:t>第二層</a:t>
             </a:r>
           </a:p>
           <a:p>
             <a:pPr lvl="2"/>
             <a:r>
-              <a:rPr lang="zh-TW" altLang="en-US" smtClean="0"/>
+              <a:rPr lang="zh-TW" altLang="en-US"/>
               <a:t>第三層</a:t>
             </a:r>
           </a:p>
           <a:p>
             <a:pPr lvl="3"/>
             <a:r>
-              <a:rPr lang="zh-TW" altLang="en-US" smtClean="0"/>
+              <a:rPr lang="zh-TW" altLang="en-US"/>
               <a:t>第四層</a:t>
             </a:r>
           </a:p>
           <a:p>
             <a:pPr lvl="4"/>
             <a:r>
-              <a:rPr lang="zh-TW" altLang="en-US" smtClean="0"/>
+              <a:rPr lang="zh-TW" altLang="en-US"/>
               <a:t>第五層</a:t>
             </a:r>
-            <a:endParaRPr lang="zh-TW" altLang="en-US"/>
           </a:p>
         </p:txBody>
       </p:sp>
@@ -650,7 +644,7 @@
           <a:p>
             <a:fld id="{BF8A0AAD-D6E1-44F2-B02F-85D3C6F6FFED}" type="datetimeFigureOut">
               <a:rPr lang="zh-TW" altLang="en-US" smtClean="0"/>
-              <a:t>2023/4/1</a:t>
+              <a:t>2024/4/6</a:t>
             </a:fld>
             <a:endParaRPr lang="zh-TW" altLang="en-US"/>
           </a:p>
@@ -739,10 +733,9 @@
           <a:lstStyle/>
           <a:p>
             <a:r>
-              <a:rPr lang="zh-TW" altLang="en-US" smtClean="0"/>
+              <a:rPr lang="zh-TW" altLang="en-US"/>
               <a:t>按一下以編輯母片標題樣式</a:t>
             </a:r>
-            <a:endParaRPr lang="zh-TW" altLang="en-US"/>
           </a:p>
         </p:txBody>
       </p:sp>
@@ -763,38 +756,37 @@
           <a:p>
             <a:pPr lvl="0"/>
             <a:r>
-              <a:rPr lang="zh-TW" altLang="en-US" smtClean="0"/>
+              <a:rPr lang="zh-TW" altLang="en-US"/>
               <a:t>按一下以編輯母片文字樣式</a:t>
             </a:r>
           </a:p>
           <a:p>
             <a:pPr lvl="1"/>
             <a:r>
-              <a:rPr lang="zh-TW" altLang="en-US" smtClean="0"/>
+              <a:rPr lang="zh-TW" altLang="en-US"/>
               <a:t>第二層</a:t>
             </a:r>
           </a:p>
           <a:p>
             <a:pPr lvl="2"/>
             <a:r>
-              <a:rPr lang="zh-TW" altLang="en-US" smtClean="0"/>
+              <a:rPr lang="zh-TW" altLang="en-US"/>
               <a:t>第三層</a:t>
             </a:r>
           </a:p>
           <a:p>
             <a:pPr lvl="3"/>
             <a:r>
-              <a:rPr lang="zh-TW" altLang="en-US" smtClean="0"/>
+              <a:rPr lang="zh-TW" altLang="en-US"/>
               <a:t>第四層</a:t>
             </a:r>
           </a:p>
           <a:p>
             <a:pPr lvl="4"/>
             <a:r>
-              <a:rPr lang="zh-TW" altLang="en-US" smtClean="0"/>
+              <a:rPr lang="zh-TW" altLang="en-US"/>
               <a:t>第五層</a:t>
             </a:r>
-            <a:endParaRPr lang="zh-TW" altLang="en-US"/>
           </a:p>
         </p:txBody>
       </p:sp>
@@ -815,7 +807,7 @@
           <a:p>
             <a:fld id="{BF8A0AAD-D6E1-44F2-B02F-85D3C6F6FFED}" type="datetimeFigureOut">
               <a:rPr lang="zh-TW" altLang="en-US" smtClean="0"/>
-              <a:t>2023/4/1</a:t>
+              <a:t>2024/4/6</a:t>
             </a:fld>
             <a:endParaRPr lang="zh-TW" altLang="en-US"/>
           </a:p>
@@ -913,10 +905,9 @@
           </a:lstStyle>
           <a:p>
             <a:r>
-              <a:rPr lang="zh-TW" altLang="en-US" smtClean="0"/>
+              <a:rPr lang="zh-TW" altLang="en-US"/>
               <a:t>按一下以編輯母片標題樣式</a:t>
             </a:r>
-            <a:endParaRPr lang="zh-TW" altLang="en-US"/>
           </a:p>
         </p:txBody>
       </p:sp>
@@ -1033,7 +1024,7 @@
           <a:p>
             <a:pPr lvl="0"/>
             <a:r>
-              <a:rPr lang="zh-TW" altLang="en-US" smtClean="0"/>
+              <a:rPr lang="zh-TW" altLang="en-US"/>
               <a:t>按一下以編輯母片文字樣式</a:t>
             </a:r>
           </a:p>
@@ -1056,7 +1047,7 @@
           <a:p>
             <a:fld id="{BF8A0AAD-D6E1-44F2-B02F-85D3C6F6FFED}" type="datetimeFigureOut">
               <a:rPr lang="zh-TW" altLang="en-US" smtClean="0"/>
-              <a:t>2023/4/1</a:t>
+              <a:t>2024/4/6</a:t>
             </a:fld>
             <a:endParaRPr lang="zh-TW" altLang="en-US"/>
           </a:p>
@@ -1145,10 +1136,9 @@
           <a:lstStyle/>
           <a:p>
             <a:r>
-              <a:rPr lang="zh-TW" altLang="en-US" smtClean="0"/>
+              <a:rPr lang="zh-TW" altLang="en-US"/>
               <a:t>按一下以編輯母片標題樣式</a:t>
             </a:r>
-            <a:endParaRPr lang="zh-TW" altLang="en-US"/>
           </a:p>
         </p:txBody>
       </p:sp>
@@ -1202,38 +1192,37 @@
           <a:p>
             <a:pPr lvl="0"/>
             <a:r>
-              <a:rPr lang="zh-TW" altLang="en-US" smtClean="0"/>
+              <a:rPr lang="zh-TW" altLang="en-US"/>
               <a:t>按一下以編輯母片文字樣式</a:t>
             </a:r>
           </a:p>
           <a:p>
             <a:pPr lvl="1"/>
             <a:r>
-              <a:rPr lang="zh-TW" altLang="en-US" smtClean="0"/>
+              <a:rPr lang="zh-TW" altLang="en-US"/>
               <a:t>第二層</a:t>
             </a:r>
           </a:p>
           <a:p>
             <a:pPr lvl="2"/>
             <a:r>
-              <a:rPr lang="zh-TW" altLang="en-US" smtClean="0"/>
+              <a:rPr lang="zh-TW" altLang="en-US"/>
               <a:t>第三層</a:t>
             </a:r>
           </a:p>
           <a:p>
             <a:pPr lvl="3"/>
             <a:r>
-              <a:rPr lang="zh-TW" altLang="en-US" smtClean="0"/>
+              <a:rPr lang="zh-TW" altLang="en-US"/>
               <a:t>第四層</a:t>
             </a:r>
           </a:p>
           <a:p>
             <a:pPr lvl="4"/>
             <a:r>
-              <a:rPr lang="zh-TW" altLang="en-US" smtClean="0"/>
+              <a:rPr lang="zh-TW" altLang="en-US"/>
               <a:t>第五層</a:t>
             </a:r>
-            <a:endParaRPr lang="zh-TW" altLang="en-US"/>
           </a:p>
         </p:txBody>
       </p:sp>
@@ -1287,38 +1276,37 @@
           <a:p>
             <a:pPr lvl="0"/>
             <a:r>
-              <a:rPr lang="zh-TW" altLang="en-US" smtClean="0"/>
+              <a:rPr lang="zh-TW" altLang="en-US"/>
               <a:t>按一下以編輯母片文字樣式</a:t>
             </a:r>
           </a:p>
           <a:p>
             <a:pPr lvl="1"/>
             <a:r>
-              <a:rPr lang="zh-TW" altLang="en-US" smtClean="0"/>
+              <a:rPr lang="zh-TW" altLang="en-US"/>
               <a:t>第二層</a:t>
             </a:r>
           </a:p>
           <a:p>
             <a:pPr lvl="2"/>
             <a:r>
-              <a:rPr lang="zh-TW" altLang="en-US" smtClean="0"/>
+              <a:rPr lang="zh-TW" altLang="en-US"/>
               <a:t>第三層</a:t>
             </a:r>
           </a:p>
           <a:p>
             <a:pPr lvl="3"/>
             <a:r>
-              <a:rPr lang="zh-TW" altLang="en-US" smtClean="0"/>
+              <a:rPr lang="zh-TW" altLang="en-US"/>
               <a:t>第四層</a:t>
             </a:r>
           </a:p>
           <a:p>
             <a:pPr lvl="4"/>
             <a:r>
-              <a:rPr lang="zh-TW" altLang="en-US" smtClean="0"/>
+              <a:rPr lang="zh-TW" altLang="en-US"/>
               <a:t>第五層</a:t>
             </a:r>
-            <a:endParaRPr lang="zh-TW" altLang="en-US"/>
           </a:p>
         </p:txBody>
       </p:sp>
@@ -1339,7 +1327,7 @@
           <a:p>
             <a:fld id="{BF8A0AAD-D6E1-44F2-B02F-85D3C6F6FFED}" type="datetimeFigureOut">
               <a:rPr lang="zh-TW" altLang="en-US" smtClean="0"/>
-              <a:t>2023/4/1</a:t>
+              <a:t>2024/4/6</a:t>
             </a:fld>
             <a:endParaRPr lang="zh-TW" altLang="en-US"/>
           </a:p>
@@ -1432,10 +1420,9 @@
           </a:lstStyle>
           <a:p>
             <a:r>
-              <a:rPr lang="zh-TW" altLang="en-US" smtClean="0"/>
+              <a:rPr lang="zh-TW" altLang="en-US"/>
               <a:t>按一下以編輯母片標題樣式</a:t>
             </a:r>
-            <a:endParaRPr lang="zh-TW" altLang="en-US"/>
           </a:p>
         </p:txBody>
       </p:sp>
@@ -1498,7 +1485,7 @@
           <a:p>
             <a:pPr lvl="0"/>
             <a:r>
-              <a:rPr lang="zh-TW" altLang="en-US" smtClean="0"/>
+              <a:rPr lang="zh-TW" altLang="en-US"/>
               <a:t>按一下以編輯母片文字樣式</a:t>
             </a:r>
           </a:p>
@@ -1554,38 +1541,37 @@
           <a:p>
             <a:pPr lvl="0"/>
             <a:r>
-              <a:rPr lang="zh-TW" altLang="en-US" smtClean="0"/>
+              <a:rPr lang="zh-TW" altLang="en-US"/>
               <a:t>按一下以編輯母片文字樣式</a:t>
             </a:r>
           </a:p>
           <a:p>
             <a:pPr lvl="1"/>
             <a:r>
-              <a:rPr lang="zh-TW" altLang="en-US" smtClean="0"/>
+              <a:rPr lang="zh-TW" altLang="en-US"/>
               <a:t>第二層</a:t>
             </a:r>
           </a:p>
           <a:p>
             <a:pPr lvl="2"/>
             <a:r>
-              <a:rPr lang="zh-TW" altLang="en-US" smtClean="0"/>
+              <a:rPr lang="zh-TW" altLang="en-US"/>
               <a:t>第三層</a:t>
             </a:r>
           </a:p>
           <a:p>
             <a:pPr lvl="3"/>
             <a:r>
-              <a:rPr lang="zh-TW" altLang="en-US" smtClean="0"/>
+              <a:rPr lang="zh-TW" altLang="en-US"/>
               <a:t>第四層</a:t>
             </a:r>
           </a:p>
           <a:p>
             <a:pPr lvl="4"/>
             <a:r>
-              <a:rPr lang="zh-TW" altLang="en-US" smtClean="0"/>
+              <a:rPr lang="zh-TW" altLang="en-US"/>
               <a:t>第五層</a:t>
             </a:r>
-            <a:endParaRPr lang="zh-TW" altLang="en-US"/>
           </a:p>
         </p:txBody>
       </p:sp>
@@ -1648,7 +1634,7 @@
           <a:p>
             <a:pPr lvl="0"/>
             <a:r>
-              <a:rPr lang="zh-TW" altLang="en-US" smtClean="0"/>
+              <a:rPr lang="zh-TW" altLang="en-US"/>
               <a:t>按一下以編輯母片文字樣式</a:t>
             </a:r>
           </a:p>
@@ -1704,38 +1690,37 @@
           <a:p>
             <a:pPr lvl="0"/>
             <a:r>
-              <a:rPr lang="zh-TW" altLang="en-US" smtClean="0"/>
+              <a:rPr lang="zh-TW" altLang="en-US"/>
               <a:t>按一下以編輯母片文字樣式</a:t>
             </a:r>
           </a:p>
           <a:p>
             <a:pPr lvl="1"/>
             <a:r>
-              <a:rPr lang="zh-TW" altLang="en-US" smtClean="0"/>
+              <a:rPr lang="zh-TW" altLang="en-US"/>
               <a:t>第二層</a:t>
             </a:r>
           </a:p>
           <a:p>
             <a:pPr lvl="2"/>
             <a:r>
-              <a:rPr lang="zh-TW" altLang="en-US" smtClean="0"/>
+              <a:rPr lang="zh-TW" altLang="en-US"/>
               <a:t>第三層</a:t>
             </a:r>
           </a:p>
           <a:p>
             <a:pPr lvl="3"/>
             <a:r>
-              <a:rPr lang="zh-TW" altLang="en-US" smtClean="0"/>
+              <a:rPr lang="zh-TW" altLang="en-US"/>
               <a:t>第四層</a:t>
             </a:r>
           </a:p>
           <a:p>
             <a:pPr lvl="4"/>
             <a:r>
-              <a:rPr lang="zh-TW" altLang="en-US" smtClean="0"/>
+              <a:rPr lang="zh-TW" altLang="en-US"/>
               <a:t>第五層</a:t>
             </a:r>
-            <a:endParaRPr lang="zh-TW" altLang="en-US"/>
           </a:p>
         </p:txBody>
       </p:sp>
@@ -1756,7 +1741,7 @@
           <a:p>
             <a:fld id="{BF8A0AAD-D6E1-44F2-B02F-85D3C6F6FFED}" type="datetimeFigureOut">
               <a:rPr lang="zh-TW" altLang="en-US" smtClean="0"/>
-              <a:t>2023/4/1</a:t>
+              <a:t>2024/4/6</a:t>
             </a:fld>
             <a:endParaRPr lang="zh-TW" altLang="en-US"/>
           </a:p>
@@ -1845,10 +1830,9 @@
           <a:lstStyle/>
           <a:p>
             <a:r>
-              <a:rPr lang="zh-TW" altLang="en-US" smtClean="0"/>
+              <a:rPr lang="zh-TW" altLang="en-US"/>
               <a:t>按一下以編輯母片標題樣式</a:t>
             </a:r>
-            <a:endParaRPr lang="zh-TW" altLang="en-US"/>
           </a:p>
         </p:txBody>
       </p:sp>
@@ -1869,7 +1853,7 @@
           <a:p>
             <a:fld id="{BF8A0AAD-D6E1-44F2-B02F-85D3C6F6FFED}" type="datetimeFigureOut">
               <a:rPr lang="zh-TW" altLang="en-US" smtClean="0"/>
-              <a:t>2023/4/1</a:t>
+              <a:t>2024/4/6</a:t>
             </a:fld>
             <a:endParaRPr lang="zh-TW" altLang="en-US"/>
           </a:p>
@@ -1959,7 +1943,7 @@
           <a:p>
             <a:fld id="{BF8A0AAD-D6E1-44F2-B02F-85D3C6F6FFED}" type="datetimeFigureOut">
               <a:rPr lang="zh-TW" altLang="en-US" smtClean="0"/>
-              <a:t>2023/4/1</a:t>
+              <a:t>2024/4/6</a:t>
             </a:fld>
             <a:endParaRPr lang="zh-TW" altLang="en-US"/>
           </a:p>
@@ -2057,10 +2041,9 @@
           </a:lstStyle>
           <a:p>
             <a:r>
-              <a:rPr lang="zh-TW" altLang="en-US" smtClean="0"/>
+              <a:rPr lang="zh-TW" altLang="en-US"/>
               <a:t>按一下以編輯母片標題樣式</a:t>
             </a:r>
-            <a:endParaRPr lang="zh-TW" altLang="en-US"/>
           </a:p>
         </p:txBody>
       </p:sp>
@@ -2114,38 +2097,37 @@
           <a:p>
             <a:pPr lvl="0"/>
             <a:r>
-              <a:rPr lang="zh-TW" altLang="en-US" smtClean="0"/>
+              <a:rPr lang="zh-TW" altLang="en-US"/>
               <a:t>按一下以編輯母片文字樣式</a:t>
             </a:r>
           </a:p>
           <a:p>
             <a:pPr lvl="1"/>
             <a:r>
-              <a:rPr lang="zh-TW" altLang="en-US" smtClean="0"/>
+              <a:rPr lang="zh-TW" altLang="en-US"/>
               <a:t>第二層</a:t>
             </a:r>
           </a:p>
           <a:p>
             <a:pPr lvl="2"/>
             <a:r>
-              <a:rPr lang="zh-TW" altLang="en-US" smtClean="0"/>
+              <a:rPr lang="zh-TW" altLang="en-US"/>
               <a:t>第三層</a:t>
             </a:r>
           </a:p>
           <a:p>
             <a:pPr lvl="3"/>
             <a:r>
-              <a:rPr lang="zh-TW" altLang="en-US" smtClean="0"/>
+              <a:rPr lang="zh-TW" altLang="en-US"/>
               <a:t>第四層</a:t>
             </a:r>
           </a:p>
           <a:p>
             <a:pPr lvl="4"/>
             <a:r>
-              <a:rPr lang="zh-TW" altLang="en-US" smtClean="0"/>
+              <a:rPr lang="zh-TW" altLang="en-US"/>
               <a:t>第五層</a:t>
             </a:r>
-            <a:endParaRPr lang="zh-TW" altLang="en-US"/>
           </a:p>
         </p:txBody>
       </p:sp>
@@ -2208,7 +2190,7 @@
           <a:p>
             <a:pPr lvl="0"/>
             <a:r>
-              <a:rPr lang="zh-TW" altLang="en-US" smtClean="0"/>
+              <a:rPr lang="zh-TW" altLang="en-US"/>
               <a:t>按一下以編輯母片文字樣式</a:t>
             </a:r>
           </a:p>
@@ -2231,7 +2213,7 @@
           <a:p>
             <a:fld id="{BF8A0AAD-D6E1-44F2-B02F-85D3C6F6FFED}" type="datetimeFigureOut">
               <a:rPr lang="zh-TW" altLang="en-US" smtClean="0"/>
-              <a:t>2023/4/1</a:t>
+              <a:t>2024/4/6</a:t>
             </a:fld>
             <a:endParaRPr lang="zh-TW" altLang="en-US"/>
           </a:p>
@@ -2329,10 +2311,9 @@
           </a:lstStyle>
           <a:p>
             <a:r>
-              <a:rPr lang="zh-TW" altLang="en-US" smtClean="0"/>
+              <a:rPr lang="zh-TW" altLang="en-US"/>
               <a:t>按一下以編輯母片標題樣式</a:t>
             </a:r>
-            <a:endParaRPr lang="zh-TW" altLang="en-US"/>
           </a:p>
         </p:txBody>
       </p:sp>
@@ -2394,10 +2375,9 @@
           </a:lstStyle>
           <a:p>
             <a:r>
-              <a:rPr lang="zh-TW" altLang="en-US" smtClean="0"/>
+              <a:rPr lang="zh-TW" altLang="en-US"/>
               <a:t>按一下圖示以新增圖片</a:t>
             </a:r>
-            <a:endParaRPr lang="zh-TW" altLang="en-US"/>
           </a:p>
         </p:txBody>
       </p:sp>
@@ -2460,7 +2440,7 @@
           <a:p>
             <a:pPr lvl="0"/>
             <a:r>
-              <a:rPr lang="zh-TW" altLang="en-US" smtClean="0"/>
+              <a:rPr lang="zh-TW" altLang="en-US"/>
               <a:t>按一下以編輯母片文字樣式</a:t>
             </a:r>
           </a:p>
@@ -2483,7 +2463,7 @@
           <a:p>
             <a:fld id="{BF8A0AAD-D6E1-44F2-B02F-85D3C6F6FFED}" type="datetimeFigureOut">
               <a:rPr lang="zh-TW" altLang="en-US" smtClean="0"/>
-              <a:t>2023/4/1</a:t>
+              <a:t>2024/4/6</a:t>
             </a:fld>
             <a:endParaRPr lang="zh-TW" altLang="en-US"/>
           </a:p>
@@ -2592,10 +2572,9 @@
           <a:lstStyle/>
           <a:p>
             <a:r>
-              <a:rPr lang="zh-TW" altLang="en-US" smtClean="0"/>
+              <a:rPr lang="zh-TW" altLang="en-US"/>
               <a:t>按一下以編輯母片標題樣式</a:t>
             </a:r>
-            <a:endParaRPr lang="zh-TW" altLang="en-US"/>
           </a:p>
         </p:txBody>
       </p:sp>
@@ -2626,38 +2605,37 @@
           <a:p>
             <a:pPr lvl="0"/>
             <a:r>
-              <a:rPr lang="zh-TW" altLang="en-US" smtClean="0"/>
+              <a:rPr lang="zh-TW" altLang="en-US"/>
               <a:t>按一下以編輯母片文字樣式</a:t>
             </a:r>
           </a:p>
           <a:p>
             <a:pPr lvl="1"/>
             <a:r>
-              <a:rPr lang="zh-TW" altLang="en-US" smtClean="0"/>
+              <a:rPr lang="zh-TW" altLang="en-US"/>
               <a:t>第二層</a:t>
             </a:r>
           </a:p>
           <a:p>
             <a:pPr lvl="2"/>
             <a:r>
-              <a:rPr lang="zh-TW" altLang="en-US" smtClean="0"/>
+              <a:rPr lang="zh-TW" altLang="en-US"/>
               <a:t>第三層</a:t>
             </a:r>
           </a:p>
           <a:p>
             <a:pPr lvl="3"/>
             <a:r>
-              <a:rPr lang="zh-TW" altLang="en-US" smtClean="0"/>
+              <a:rPr lang="zh-TW" altLang="en-US"/>
               <a:t>第四層</a:t>
             </a:r>
           </a:p>
           <a:p>
             <a:pPr lvl="4"/>
             <a:r>
-              <a:rPr lang="zh-TW" altLang="en-US" smtClean="0"/>
+              <a:rPr lang="zh-TW" altLang="en-US"/>
               <a:t>第五層</a:t>
             </a:r>
-            <a:endParaRPr lang="zh-TW" altLang="en-US"/>
           </a:p>
         </p:txBody>
       </p:sp>
@@ -2696,7 +2674,7 @@
           <a:p>
             <a:fld id="{BF8A0AAD-D6E1-44F2-B02F-85D3C6F6FFED}" type="datetimeFigureOut">
               <a:rPr lang="zh-TW" altLang="en-US" smtClean="0"/>
-              <a:t>2023/4/1</a:t>
+              <a:t>2024/4/6</a:t>
             </a:fld>
             <a:endParaRPr lang="zh-TW" altLang="en-US"/>
           </a:p>
@@ -3171,17 +3149,7 @@
                 <a:latin typeface="微軟正黑體" pitchFamily="34" charset="-120"/>
                 <a:ea typeface="微軟正黑體" pitchFamily="34" charset="-120"/>
               </a:rPr>
-              <a:t>主耶穌  我感</a:t>
-            </a:r>
-            <a:r>
-              <a:rPr lang="zh-TW" altLang="en-US" sz="6400" b="1" dirty="0" smtClean="0">
-                <a:solidFill>
-                  <a:srgbClr val="660033"/>
-                </a:solidFill>
-                <a:latin typeface="微軟正黑體" pitchFamily="34" charset="-120"/>
-                <a:ea typeface="微軟正黑體" pitchFamily="34" charset="-120"/>
-              </a:rPr>
-              <a:t>謝</a:t>
+              <a:t>主耶穌  我感謝</a:t>
             </a:r>
             <a:r>
               <a:rPr lang="zh-CN" altLang="en-US" sz="6400" b="1" dirty="0">
@@ -3216,24 +3184,14 @@
               <a:t>祢</a:t>
             </a:r>
             <a:r>
-              <a:rPr lang="zh-TW" altLang="en-US" sz="6400" b="1" dirty="0" smtClean="0">
+              <a:rPr lang="zh-TW" altLang="en-US" sz="6400" b="1" dirty="0">
                 <a:solidFill>
                   <a:srgbClr val="660033"/>
                 </a:solidFill>
                 <a:latin typeface="微軟正黑體" pitchFamily="34" charset="-120"/>
                 <a:ea typeface="微軟正黑體" pitchFamily="34" charset="-120"/>
               </a:rPr>
-              <a:t>的</a:t>
-            </a:r>
-            <a:r>
-              <a:rPr lang="zh-TW" altLang="en-US" sz="6400" b="1" dirty="0">
-                <a:solidFill>
-                  <a:srgbClr val="660033"/>
-                </a:solidFill>
-                <a:latin typeface="微軟正黑體" pitchFamily="34" charset="-120"/>
-                <a:ea typeface="微軟正黑體" pitchFamily="34" charset="-120"/>
-              </a:rPr>
-              <a:t>身體  為我而捨</a:t>
+              <a:t>的身體  為我而捨</a:t>
             </a:r>
           </a:p>
         </p:txBody>
@@ -3262,7 +3220,7 @@
           <a:p>
             <a:pPr algn="ctr"/>
             <a:r>
-              <a:rPr lang="en-US" sz="3600" b="1" dirty="0" smtClean="0">
+              <a:rPr lang="en-US" sz="3600" b="1" dirty="0">
                 <a:solidFill>
                   <a:srgbClr val="660033"/>
                 </a:solidFill>
@@ -3272,17 +3230,17 @@
               <a:t>( </a:t>
             </a:r>
             <a:r>
-              <a:rPr lang="zh-CN" altLang="en-US" sz="3600" b="1" dirty="0" smtClean="0">
+              <a:rPr lang="zh-CN" altLang="en-US" sz="3600" b="1" dirty="0">
                 <a:solidFill>
                   <a:srgbClr val="660033"/>
                 </a:solidFill>
                 <a:latin typeface="Microsoft JhengHei" panose="020B0604030504040204" pitchFamily="34" charset="-120"/>
                 <a:ea typeface="Microsoft JhengHei" panose="020B0604030504040204" pitchFamily="34" charset="-120"/>
               </a:rPr>
-              <a:t>正</a:t>
-            </a:r>
-            <a:r>
-              <a:rPr lang="en-US" altLang="zh-CN" sz="3600" b="1" dirty="0" smtClean="0">
+              <a:t>正歌</a:t>
+            </a:r>
+            <a:r>
+              <a:rPr lang="en-US" altLang="zh-CN" sz="3600" b="1" dirty="0">
                 <a:solidFill>
                   <a:srgbClr val="660033"/>
                 </a:solidFill>
@@ -3292,7 +3250,7 @@
               <a:t> 1</a:t>
             </a:r>
             <a:r>
-              <a:rPr lang="en-US" sz="3600" b="1" dirty="0" smtClean="0">
+              <a:rPr lang="en-US" sz="3600" b="1" dirty="0">
                 <a:solidFill>
                   <a:srgbClr val="660033"/>
                 </a:solidFill>
@@ -3454,7 +3412,7 @@
                 <a:latin typeface="Microsoft JhengHei" panose="020B0604030504040204" pitchFamily="34" charset="-120"/>
                 <a:ea typeface="Microsoft JhengHei" panose="020B0604030504040204" pitchFamily="34" charset="-120"/>
               </a:rPr>
-              <a:t>正</a:t>
+              <a:t>正歌</a:t>
             </a:r>
             <a:r>
               <a:rPr lang="en-US" altLang="zh-CN" sz="3600" b="1" dirty="0">
@@ -3548,17 +3506,7 @@
                 <a:latin typeface="微軟正黑體" pitchFamily="34" charset="-120"/>
                 <a:ea typeface="微軟正黑體" pitchFamily="34" charset="-120"/>
               </a:rPr>
-              <a:t>主耶穌  我感</a:t>
-            </a:r>
-            <a:r>
-              <a:rPr lang="zh-TW" altLang="en-US" sz="6400" b="1" dirty="0" smtClean="0">
-                <a:solidFill>
-                  <a:srgbClr val="660033"/>
-                </a:solidFill>
-                <a:latin typeface="微軟正黑體" pitchFamily="34" charset="-120"/>
-                <a:ea typeface="微軟正黑體" pitchFamily="34" charset="-120"/>
-              </a:rPr>
-              <a:t>謝</a:t>
+              <a:t>主耶穌  我感謝</a:t>
             </a:r>
             <a:r>
               <a:rPr lang="zh-CN" altLang="en-US" sz="6400" b="1" dirty="0">
@@ -3593,24 +3541,14 @@
               <a:t>祢</a:t>
             </a:r>
             <a:r>
-              <a:rPr lang="zh-TW" altLang="en-US" sz="6400" b="1" dirty="0" smtClean="0">
+              <a:rPr lang="zh-TW" altLang="en-US" sz="6400" b="1" dirty="0">
                 <a:solidFill>
                   <a:srgbClr val="660033"/>
                 </a:solidFill>
                 <a:latin typeface="微軟正黑體" pitchFamily="34" charset="-120"/>
                 <a:ea typeface="微軟正黑體" pitchFamily="34" charset="-120"/>
               </a:rPr>
-              <a:t>的</a:t>
-            </a:r>
-            <a:r>
-              <a:rPr lang="zh-TW" altLang="en-US" sz="6400" b="1" dirty="0">
-                <a:solidFill>
-                  <a:srgbClr val="660033"/>
-                </a:solidFill>
-                <a:latin typeface="微軟正黑體" pitchFamily="34" charset="-120"/>
-                <a:ea typeface="微軟正黑體" pitchFamily="34" charset="-120"/>
-              </a:rPr>
-              <a:t>寶血  為我而流</a:t>
+              <a:t>的寶血  為我而流</a:t>
             </a:r>
           </a:p>
         </p:txBody>
@@ -3656,7 +3594,7 @@
                 <a:latin typeface="Microsoft JhengHei" panose="020B0604030504040204" pitchFamily="34" charset="-120"/>
                 <a:ea typeface="Microsoft JhengHei" panose="020B0604030504040204" pitchFamily="34" charset="-120"/>
               </a:rPr>
-              <a:t>正</a:t>
+              <a:t>正歌</a:t>
             </a:r>
             <a:r>
               <a:rPr lang="en-US" altLang="zh-CN" sz="3600" b="1" dirty="0">
@@ -3666,37 +3604,17 @@
                 <a:latin typeface="Microsoft JhengHei" panose="020B0604030504040204" pitchFamily="34" charset="-120"/>
                 <a:ea typeface="Microsoft JhengHei" panose="020B0604030504040204" pitchFamily="34" charset="-120"/>
               </a:rPr>
-              <a:t> </a:t>
-            </a:r>
-            <a:r>
-              <a:rPr lang="en-US" altLang="zh-CN" sz="3600" b="1" dirty="0" smtClean="0">
+              <a:t> 2</a:t>
+            </a:r>
+            <a:r>
+              <a:rPr lang="en-US" sz="3600" b="1" dirty="0">
                 <a:solidFill>
                   <a:srgbClr val="660033"/>
                 </a:solidFill>
                 <a:latin typeface="Microsoft JhengHei" panose="020B0604030504040204" pitchFamily="34" charset="-120"/>
                 <a:ea typeface="Microsoft JhengHei" panose="020B0604030504040204" pitchFamily="34" charset="-120"/>
               </a:rPr>
-              <a:t>2</a:t>
-            </a:r>
-            <a:r>
-              <a:rPr lang="en-US" sz="3600" b="1" dirty="0" smtClean="0">
-                <a:solidFill>
-                  <a:srgbClr val="660033"/>
-                </a:solidFill>
-                <a:latin typeface="Microsoft JhengHei" panose="020B0604030504040204" pitchFamily="34" charset="-120"/>
-                <a:ea typeface="Microsoft JhengHei" panose="020B0604030504040204" pitchFamily="34" charset="-120"/>
-              </a:rPr>
-              <a:t> </a:t>
-            </a:r>
-            <a:r>
-              <a:rPr lang="en-US" sz="3600" b="1" dirty="0">
-                <a:solidFill>
-                  <a:srgbClr val="660033"/>
-                </a:solidFill>
-                <a:latin typeface="Microsoft JhengHei" panose="020B0604030504040204" pitchFamily="34" charset="-120"/>
-                <a:ea typeface="Microsoft JhengHei" panose="020B0604030504040204" pitchFamily="34" charset="-120"/>
-              </a:rPr>
-              <a:t>)</a:t>
+              <a:t> )</a:t>
             </a:r>
             <a:endParaRPr lang="vi-VN" sz="3600" b="1" dirty="0">
               <a:solidFill>
@@ -3831,7 +3749,7 @@
                 <a:latin typeface="Microsoft JhengHei" panose="020B0604030504040204" pitchFamily="34" charset="-120"/>
                 <a:ea typeface="Microsoft JhengHei" panose="020B0604030504040204" pitchFamily="34" charset="-120"/>
               </a:rPr>
-              <a:t>正</a:t>
+              <a:t>正歌</a:t>
             </a:r>
             <a:r>
               <a:rPr lang="en-US" altLang="zh-CN" sz="3600" b="1" dirty="0">
@@ -3940,17 +3858,7 @@
                 <a:latin typeface="微軟正黑體" pitchFamily="34" charset="-120"/>
                 <a:ea typeface="微軟正黑體" pitchFamily="34" charset="-120"/>
               </a:rPr>
-              <a:t>主耶穌  我俯伏敬</a:t>
-            </a:r>
-            <a:r>
-              <a:rPr lang="zh-TW" altLang="en-US" sz="6400" b="1" dirty="0" smtClean="0">
-                <a:solidFill>
-                  <a:srgbClr val="660033"/>
-                </a:solidFill>
-                <a:latin typeface="微軟正黑體" pitchFamily="34" charset="-120"/>
-                <a:ea typeface="微軟正黑體" pitchFamily="34" charset="-120"/>
-              </a:rPr>
-              <a:t>拜</a:t>
+              <a:t>主耶穌  我俯伏敬拜</a:t>
             </a:r>
             <a:r>
               <a:rPr lang="zh-CN" altLang="en-US" sz="6400" b="1" dirty="0">
@@ -3996,7 +3904,7 @@
           <a:p>
             <a:pPr algn="ctr"/>
             <a:r>
-              <a:rPr lang="en-US" sz="3600" b="1" dirty="0" smtClean="0">
+              <a:rPr lang="en-US" sz="3600" b="1" dirty="0">
                 <a:solidFill>
                   <a:srgbClr val="660033"/>
                 </a:solidFill>
@@ -4006,24 +3914,24 @@
               <a:t>( </a:t>
             </a:r>
             <a:r>
-              <a:rPr lang="zh-CN" altLang="en-US" sz="3600" b="1" dirty="0" smtClean="0">
+              <a:rPr lang="zh-CN" altLang="en-US" sz="3600" b="1" dirty="0">
                 <a:solidFill>
                   <a:srgbClr val="660033"/>
                 </a:solidFill>
                 <a:latin typeface="Microsoft JhengHei" panose="020B0604030504040204" pitchFamily="34" charset="-120"/>
                 <a:ea typeface="Microsoft JhengHei" panose="020B0604030504040204" pitchFamily="34" charset="-120"/>
               </a:rPr>
-              <a:t>副</a:t>
-            </a:r>
-            <a:r>
-              <a:rPr lang="en-US" sz="3600" b="1" dirty="0" smtClean="0">
+              <a:t>副歌 </a:t>
+            </a:r>
+            <a:r>
+              <a:rPr lang="en-US" sz="3600" b="1" dirty="0">
                 <a:solidFill>
                   <a:srgbClr val="660033"/>
                 </a:solidFill>
                 <a:latin typeface="Microsoft JhengHei" panose="020B0604030504040204" pitchFamily="34" charset="-120"/>
                 <a:ea typeface="Microsoft JhengHei" panose="020B0604030504040204" pitchFamily="34" charset="-120"/>
               </a:rPr>
-              <a:t> )</a:t>
+              <a:t>)</a:t>
             </a:r>
             <a:endParaRPr lang="vi-VN" sz="3600" b="1" dirty="0">
               <a:solidFill>
@@ -4097,17 +4005,7 @@
                 <a:latin typeface="微軟正黑體" pitchFamily="34" charset="-120"/>
                 <a:ea typeface="微軟正黑體" pitchFamily="34" charset="-120"/>
               </a:rPr>
-              <a:t>寶貴十架的救恩  </a:t>
-            </a:r>
-            <a:r>
-              <a:rPr lang="zh-TW" altLang="en-US" sz="6400" b="1" dirty="0" smtClean="0">
-                <a:solidFill>
-                  <a:srgbClr val="660033"/>
-                </a:solidFill>
-                <a:latin typeface="微軟正黑體" pitchFamily="34" charset="-120"/>
-                <a:ea typeface="微軟正黑體" pitchFamily="34" charset="-120"/>
-              </a:rPr>
-              <a:t>是</a:t>
+              <a:t>寶貴十架的救恩  是</a:t>
             </a:r>
             <a:r>
               <a:rPr lang="zh-CN" altLang="en-US" sz="6400" b="1" dirty="0">
@@ -4120,24 +4018,14 @@
               <a:t>祢</a:t>
             </a:r>
             <a:r>
-              <a:rPr lang="zh-TW" altLang="en-US" sz="6400" b="1" dirty="0" smtClean="0">
+              <a:rPr lang="zh-TW" altLang="en-US" sz="6400" b="1" dirty="0">
                 <a:solidFill>
                   <a:srgbClr val="660033"/>
                 </a:solidFill>
                 <a:latin typeface="微軟正黑體" pitchFamily="34" charset="-120"/>
                 <a:ea typeface="微軟正黑體" pitchFamily="34" charset="-120"/>
               </a:rPr>
-              <a:t>所</a:t>
-            </a:r>
-            <a:r>
-              <a:rPr lang="zh-TW" altLang="en-US" sz="6400" b="1" dirty="0">
-                <a:solidFill>
-                  <a:srgbClr val="660033"/>
-                </a:solidFill>
-                <a:latin typeface="微軟正黑體" pitchFamily="34" charset="-120"/>
-                <a:ea typeface="微軟正黑體" pitchFamily="34" charset="-120"/>
-              </a:rPr>
-              <a:t>立的約</a:t>
+              <a:t>所立的約</a:t>
             </a:r>
           </a:p>
           <a:p>
@@ -4155,24 +4043,14 @@
               <a:t>祢</a:t>
             </a:r>
             <a:r>
-              <a:rPr lang="zh-TW" altLang="en-US" sz="6400" b="1" dirty="0" smtClean="0">
+              <a:rPr lang="zh-TW" altLang="en-US" sz="6400" b="1" dirty="0">
                 <a:solidFill>
                   <a:srgbClr val="660033"/>
                 </a:solidFill>
                 <a:latin typeface="微軟正黑體" pitchFamily="34" charset="-120"/>
                 <a:ea typeface="微軟正黑體" pitchFamily="34" charset="-120"/>
               </a:rPr>
-              <a:t>的</a:t>
-            </a:r>
-            <a:r>
-              <a:rPr lang="zh-TW" altLang="en-US" sz="6400" b="1" dirty="0">
-                <a:solidFill>
-                  <a:srgbClr val="660033"/>
-                </a:solidFill>
-                <a:latin typeface="微軟正黑體" pitchFamily="34" charset="-120"/>
-                <a:ea typeface="微軟正黑體" pitchFamily="34" charset="-120"/>
-              </a:rPr>
-              <a:t>愛永遠不會改變</a:t>
+              <a:t>的愛永遠不會改變</a:t>
             </a:r>
           </a:p>
         </p:txBody>
@@ -4201,7 +4079,7 @@
           <a:p>
             <a:pPr algn="ctr"/>
             <a:r>
-              <a:rPr lang="en-US" sz="3600" b="1" dirty="0" smtClean="0">
+              <a:rPr lang="en-US" sz="3600" b="1" dirty="0">
                 <a:solidFill>
                   <a:srgbClr val="660033"/>
                 </a:solidFill>
@@ -4211,24 +4089,24 @@
               <a:t>( </a:t>
             </a:r>
             <a:r>
-              <a:rPr lang="zh-CN" altLang="en-US" sz="3600" b="1" dirty="0" smtClean="0">
+              <a:rPr lang="zh-CN" altLang="en-US" sz="3600" b="1">
                 <a:solidFill>
                   <a:srgbClr val="660033"/>
                 </a:solidFill>
                 <a:latin typeface="Microsoft JhengHei" panose="020B0604030504040204" pitchFamily="34" charset="-120"/>
                 <a:ea typeface="Microsoft JhengHei" panose="020B0604030504040204" pitchFamily="34" charset="-120"/>
               </a:rPr>
-              <a:t>副</a:t>
-            </a:r>
-            <a:r>
-              <a:rPr lang="en-US" sz="3600" b="1" dirty="0" smtClean="0">
+              <a:t>副歌 </a:t>
+            </a:r>
+            <a:r>
+              <a:rPr lang="en-US" sz="3600" b="1">
                 <a:solidFill>
                   <a:srgbClr val="660033"/>
                 </a:solidFill>
                 <a:latin typeface="Microsoft JhengHei" panose="020B0604030504040204" pitchFamily="34" charset="-120"/>
                 <a:ea typeface="Microsoft JhengHei" panose="020B0604030504040204" pitchFamily="34" charset="-120"/>
               </a:rPr>
-              <a:t> )</a:t>
+              <a:t>)</a:t>
             </a:r>
             <a:endParaRPr lang="vi-VN" sz="3600" b="1" dirty="0">
               <a:solidFill>
